--- a/新・仕様書.pptx
+++ b/新・仕様書.pptx
@@ -8,7 +8,8 @@
     <p:sldId id="256" r:id="rId2"/>
     <p:sldId id="259" r:id="rId3"/>
     <p:sldId id="257" r:id="rId4"/>
-    <p:sldId id="258" r:id="rId5"/>
+    <p:sldId id="260" r:id="rId5"/>
+    <p:sldId id="258" r:id="rId6"/>
   </p:sldIdLst>
   <p:sldSz cx="12192000" cy="6858000"/>
   <p:notesSz cx="6858000" cy="9144000"/>
@@ -3897,6 +3898,12 @@
             <a:pPr marL="0" indent="0">
               <a:buNone/>
             </a:pPr>
+            <a:endParaRPr lang="en-US" altLang="ja-JP" dirty="0"/>
+          </a:p>
+          <a:p>
+            <a:pPr marL="0" indent="0">
+              <a:buNone/>
+            </a:pPr>
             <a:r>
               <a:rPr lang="ja-JP" altLang="en-US" dirty="0"/>
               <a:t>でお酒のキャパを計算する</a:t>
@@ -3937,6 +3944,128 @@
 </file>
 
 <file path=ppt/slides/slide4.xml><?xml version="1.0" encoding="utf-8"?>
+<p:sld xmlns:a="http://schemas.openxmlformats.org/drawingml/2006/main" xmlns:r="http://schemas.openxmlformats.org/officeDocument/2006/relationships" xmlns:p="http://schemas.openxmlformats.org/presentationml/2006/main">
+  <p:cSld>
+    <p:spTree>
+      <p:nvGrpSpPr>
+        <p:cNvPr id="1" name=""/>
+        <p:cNvGrpSpPr/>
+        <p:nvPr/>
+      </p:nvGrpSpPr>
+      <p:grpSpPr>
+        <a:xfrm>
+          <a:off x="0" y="0"/>
+          <a:ext cx="0" cy="0"/>
+          <a:chOff x="0" y="0"/>
+          <a:chExt cx="0" cy="0"/>
+        </a:xfrm>
+      </p:grpSpPr>
+      <p:sp>
+        <p:nvSpPr>
+          <p:cNvPr id="2" name="タイトル 1">
+            <a:extLst>
+              <a:ext uri="{FF2B5EF4-FFF2-40B4-BE49-F238E27FC236}">
+                <a16:creationId xmlns:a16="http://schemas.microsoft.com/office/drawing/2014/main" id="{A2D0CBBE-464B-ABF7-657B-C9C58D7D558A}"/>
+              </a:ext>
+            </a:extLst>
+          </p:cNvPr>
+          <p:cNvSpPr>
+            <a:spLocks noGrp="1"/>
+          </p:cNvSpPr>
+          <p:nvPr>
+            <p:ph type="title"/>
+          </p:nvPr>
+        </p:nvSpPr>
+        <p:spPr/>
+        <p:txBody>
+          <a:bodyPr/>
+          <a:lstStyle/>
+          <a:p>
+            <a:r>
+              <a:rPr kumimoji="1" lang="ja-JP" altLang="en-US" dirty="0"/>
+              <a:t>概要</a:t>
+            </a:r>
+          </a:p>
+        </p:txBody>
+      </p:sp>
+      <p:sp>
+        <p:nvSpPr>
+          <p:cNvPr id="3" name="コンテンツ プレースホルダー 2">
+            <a:extLst>
+              <a:ext uri="{FF2B5EF4-FFF2-40B4-BE49-F238E27FC236}">
+                <a16:creationId xmlns:a16="http://schemas.microsoft.com/office/drawing/2014/main" id="{4607F007-4EDC-BA80-875B-E9BB89ACFD99}"/>
+              </a:ext>
+            </a:extLst>
+          </p:cNvPr>
+          <p:cNvSpPr>
+            <a:spLocks noGrp="1"/>
+          </p:cNvSpPr>
+          <p:nvPr>
+            <p:ph idx="1"/>
+          </p:nvPr>
+        </p:nvSpPr>
+        <p:spPr/>
+        <p:txBody>
+          <a:bodyPr/>
+          <a:lstStyle/>
+          <a:p>
+            <a:pPr marL="0" indent="0">
+              <a:buNone/>
+            </a:pPr>
+            <a:r>
+              <a:rPr kumimoji="1" lang="ja-JP" altLang="en-US" dirty="0"/>
+              <a:t>飲料データは（ｍｌ・度数）は登録データに含む</a:t>
+            </a:r>
+            <a:endParaRPr kumimoji="1" lang="en-US" altLang="ja-JP" dirty="0"/>
+          </a:p>
+          <a:p>
+            <a:pPr marL="0" indent="0">
+              <a:buNone/>
+            </a:pPr>
+            <a:r>
+              <a:rPr lang="ja-JP" altLang="en-US" dirty="0"/>
+              <a:t>管理単位は一回の来店ごと</a:t>
+            </a:r>
+            <a:endParaRPr lang="en-US" altLang="ja-JP" dirty="0"/>
+          </a:p>
+          <a:p>
+            <a:pPr marL="0" indent="0">
+              <a:buNone/>
+            </a:pPr>
+            <a:r>
+              <a:rPr kumimoji="1" lang="ja-JP" altLang="en-US" dirty="0"/>
+              <a:t>データリセットは会計の際</a:t>
+            </a:r>
+            <a:endParaRPr kumimoji="1" lang="en-US" altLang="ja-JP"/>
+          </a:p>
+          <a:p>
+            <a:pPr marL="0" indent="0">
+              <a:buNone/>
+            </a:pPr>
+            <a:endParaRPr kumimoji="1" lang="en-US" altLang="ja-JP"/>
+          </a:p>
+          <a:p>
+            <a:pPr marL="0" indent="0">
+              <a:buNone/>
+            </a:pPr>
+            <a:endParaRPr kumimoji="1" lang="ja-JP" altLang="en-US" dirty="0"/>
+          </a:p>
+        </p:txBody>
+      </p:sp>
+    </p:spTree>
+    <p:extLst>
+      <p:ext uri="{BB962C8B-B14F-4D97-AF65-F5344CB8AC3E}">
+        <p14:creationId xmlns:p14="http://schemas.microsoft.com/office/powerpoint/2010/main" val="4101508638"/>
+      </p:ext>
+    </p:extLst>
+  </p:cSld>
+  <p:clrMapOvr>
+    <a:masterClrMapping/>
+  </p:clrMapOvr>
+</p:sld>
+</file>
+
+<file path=ppt/slides/slide5.xml><?xml version="1.0" encoding="utf-8"?>
 <p:sld xmlns:a="http://schemas.openxmlformats.org/drawingml/2006/main" xmlns:r="http://schemas.openxmlformats.org/officeDocument/2006/relationships" xmlns:p="http://schemas.openxmlformats.org/presentationml/2006/main">
   <p:cSld>
     <p:spTree>
